--- a/artifacts/speaking-portfolio-expanded/talks/dynamic-scaling/dynamic-scaling-40min-handout.pptx
+++ b/artifacts/speaking-portfolio-expanded/talks/dynamic-scaling/dynamic-scaling-40min-handout.pptx
@@ -204,7 +204,7 @@
                 <a:ea typeface="Arial"/>
                 <a:cs typeface="Arial"/>
               </a:rPr>
-              <a:t xml:space="preserve">[Presenter scripts](../packets/dynamic-scaling/script-40min.md) · [Contracts](../packets/dynamic-scaling/contracts.md) · [Walkthrough](../packets/dynamic-scaling/demo.md) · [Evidence](../packets/dynamic-scaling/evidence-bank.md)</a:t>
+              <a:t xml:space="preserve">[Presenter scripts](script-40min.md) · [Contracts](contracts.md) · [Walkthrough](demo.md) · [Evidence](evidence-bank.md)</a:t>
             </a:r>
             <a:endParaRPr lang="en-US" sz="1200"/>
           </a:p>
@@ -409,7 +409,7 @@
                 <a:ea typeface="Arial"/>
                 <a:cs typeface="Arial"/>
               </a:rPr>
-              <a:t xml:space="preserve">![Sandboxes, serverless GPUs, durable edge state and spot capacity, all created in seconds and torn down by default.](../../reveal-talks/assets/dynamic-scaling/08-the-ephemeral-ecosystem.svg)</a:t>
+              <a:t xml:space="preserve">![Sandboxes, serverless GPUs, durable edge state and spot capacity, all created in seconds and torn down by default.](../../../../public/talks/assets/dynamic-scaling/08-the-ephemeral-ecosystem.svg)</a:t>
             </a:r>
             <a:endParaRPr lang="en-US" sz="1200"/>
           </a:p>
@@ -913,7 +913,7 @@
                 <a:ea typeface="Arial"/>
                 <a:cs typeface="Arial"/>
               </a:rPr>
-              <a:t xml:space="preserve">![Sandboxes, serverless GPUs, durable edge state and spot capacity, all created in seconds and torn down by default.](../../reveal-talks/assets/dynamic-scaling/08-the-ephemeral-ecosystem.svg)</a:t>
+              <a:t xml:space="preserve">![Sandboxes, serverless GPUs, durable edge state and spot capacity, all created in seconds and torn down by default.](../../../../public/talks/assets/dynamic-scaling/08-the-ephemeral-ecosystem.svg)</a:t>
             </a:r>
             <a:endParaRPr lang="en-US" sz="1200"/>
           </a:p>
@@ -1806,7 +1806,7 @@
                 <a:ea typeface="Arial"/>
                 <a:cs typeface="Arial"/>
               </a:rPr>
-              <a:t xml:space="preserve">![Persist intent and provider identity; uncertain acceptance goes to reconciliation, not blind replay.](../../reveal-talks/assets/dynamic-scaling/08-a-job-survives-the-caller.svg)</a:t>
+              <a:t xml:space="preserve">![Persist intent and provider identity; uncertain acceptance goes to reconciliation, not blind replay.](../../../../public/talks/assets/dynamic-scaling/08-a-job-survives-the-caller.svg)</a:t>
             </a:r>
             <a:endParaRPr lang="en-US" sz="1200"/>
           </a:p>
@@ -2676,7 +2676,7 @@
                 <a:ea typeface="Arial"/>
                 <a:cs typeface="Arial"/>
               </a:rPr>
-              <a:t xml:space="preserve">![Cheap parallel generation produces candidates; shared gates reject before preference; cheap multi-model judges report disagreement rather than an average score.](../../reveal-talks/assets/dynamic-scaling/12-monkeys-then-guards.svg)</a:t>
+              <a:t xml:space="preserve">![Cheap parallel generation produces candidates; shared gates reject before preference; cheap multi-model judges report disagreement rather than an average score.](../../../../public/talks/assets/dynamic-scaling/12-monkeys-then-guards.svg)</a:t>
             </a:r>
             <a:endParaRPr lang="en-US" sz="1200"/>
           </a:p>
@@ -3387,7 +3387,7 @@
                 <a:ea typeface="Arial"/>
                 <a:cs typeface="Arial"/>
               </a:rPr>
-              <a:t xml:space="preserve">![Cheap parallel generation produces candidates; shared gates reject before preference; cheap multi-model judges report disagreement rather than an average score.](../../reveal-talks/assets/dynamic-scaling/12-monkeys-then-guards.svg)</a:t>
+              <a:t xml:space="preserve">![Cheap parallel generation produces candidates; shared gates reject before preference; cheap multi-model judges report disagreement rather than an average score.](../../../../public/talks/assets/dynamic-scaling/12-monkeys-then-guards.svg)</a:t>
             </a:r>
             <a:endParaRPr lang="en-US" sz="1200"/>
           </a:p>
@@ -4098,7 +4098,7 @@
                 <a:ea typeface="Arial"/>
                 <a:cs typeface="Arial"/>
               </a:rPr>
-              <a:t xml:space="preserve">![Cheap parallel generation produces candidates; shared gates reject before preference; cheap multi-model judges report disagreement rather than an average score.](../../reveal-talks/assets/dynamic-scaling/12-monkeys-then-guards.svg)</a:t>
+              <a:t xml:space="preserve">![Cheap parallel generation produces candidates; shared gates reject before preference; cheap multi-model judges report disagreement rather than an average score.](../../../../public/talks/assets/dynamic-scaling/12-monkeys-then-guards.svg)</a:t>
             </a:r>
             <a:endParaRPr lang="en-US" sz="1200"/>
           </a:p>
@@ -5656,7 +5656,7 @@
                 <a:ea typeface="Arial"/>
                 <a:cs typeface="Arial"/>
               </a:rPr>
-              <a:t xml:space="preserve">![Each of four batch-tool calls starts ten jobs: 4 × 10 = 40, before retries.](../../reveal-talks/assets/dynamic-scaling/01-four-calls-hide-forty-provider-jobs.svg)</a:t>
+              <a:t xml:space="preserve">![Each of four batch-tool calls starts ten jobs: 4 × 10 = 40, before retries.](../../../../public/talks/assets/dynamic-scaling/01-four-calls-hide-forty-provider-jobs.svg)</a:t>
             </a:r>
             <a:endParaRPr lang="en-US" sz="1200"/>
           </a:p>
@@ -6296,7 +6296,7 @@
                 <a:ea typeface="Arial"/>
                 <a:cs typeface="Arial"/>
               </a:rPr>
-              <a:t xml:space="preserve">![Ops sized the fleet for everyone; an autoscaler reacts to CPU; an agentic job describes its own shape and asks.](../../reveal-talks/assets/dynamic-scaling/02-horizontal-vertical-self-directed.svg)</a:t>
+              <a:t xml:space="preserve">![Ops sized the fleet for everyone; an autoscaler reacts to CPU; an agentic job describes its own shape and asks.](../../../../public/talks/assets/dynamic-scaling/02-horizontal-vertical-self-directed.svg)</a:t>
             </a:r>
             <a:endParaRPr lang="en-US" sz="1200"/>
           </a:p>
@@ -6777,7 +6777,7 @@
                 <a:ea typeface="Arial"/>
                 <a:cs typeface="Arial"/>
               </a:rPr>
-              <a:t xml:space="preserve">![One retry per item can turn 40 logical items into 80 provider attempts.](../../reveal-talks/assets/dynamic-scaling/03-count-items-and-attempts-separately.svg)</a:t>
+              <a:t xml:space="preserve">![One retry per item can turn 40 logical items into 80 provider attempts.](../../../../public/talks/assets/dynamic-scaling/03-count-items-and-attempts-separately.svg)</a:t>
             </a:r>
             <a:endParaRPr lang="en-US" sz="1200"/>
           </a:p>
@@ -7166,7 +7166,7 @@
                 <a:ea typeface="Arial"/>
                 <a:cs typeface="Arial"/>
               </a:rPr>
-              <a:t xml:space="preserve">![One coordinated reservation protects tenant spend and entitlement across all callers.](../../reveal-talks/assets/dynamic-scaling/04-every-caller-crosses-shared-admission.svg)</a:t>
+              <a:t xml:space="preserve">![One coordinated reservation protects tenant spend and entitlement across all callers.](../../../../public/talks/assets/dynamic-scaling/04-every-caller-crosses-shared-admission.svg)</a:t>
             </a:r>
             <a:endParaRPr lang="en-US" sz="1200"/>
           </a:p>
@@ -7601,7 +7601,7 @@
                 <a:ea typeface="Arial"/>
                 <a:cs typeface="Arial"/>
               </a:rPr>
-              <a:t xml:space="preserve">![Illustrative $2 run cap: settled + reserved ≤ $2. Prices here are invented fixture values.](../../reveal-talks/assets/dynamic-scaling/05-reservations-and-charges-share-one-ceiling.svg)</a:t>
+              <a:t xml:space="preserve">![Illustrative $2 run cap: settled + reserved ≤ $2. Prices here are invented fixture values.](../../../../public/talks/assets/dynamic-scaling/05-reservations-and-charges-share-one-ceiling.svg)</a:t>
             </a:r>
             <a:endParaRPr lang="en-US" sz="1200"/>
           </a:p>
@@ -8036,7 +8036,7 @@
                 <a:ea typeface="Arial"/>
                 <a:cs typeface="Arial"/>
               </a:rPr>
-              <a:t xml:space="preserve">![The scheduler reduces admission after throttling; every increase remains inside the approved maximum.](../../reveal-talks/assets/dynamic-scaling/06-adapt-pressure-within-a-fixed-limit.svg)</a:t>
+              <a:t xml:space="preserve">![The scheduler reduces admission after throttling; every increase remains inside the approved maximum.](../../../../public/talks/assets/dynamic-scaling/06-adapt-pressure-within-a-fixed-limit.svg)</a:t>
             </a:r>
             <a:endParaRPr lang="en-US" sz="1200"/>
           </a:p>
@@ -8471,7 +8471,7 @@
                 <a:ea typeface="Arial"/>
                 <a:cs typeface="Arial"/>
               </a:rPr>
-              <a:t xml:space="preserve">![The job requests shape, size, duration and a cost cap; the scheduler resolves it against a catalog and tenant budget and returns a lease.](../../reveal-talks/assets/dynamic-scaling/07-infra-as-an-agent-capability.svg)</a:t>
+              <a:t xml:space="preserve">![The job requests shape, size, duration and a cost cap; the scheduler resolves it against a catalog and tenant budget and returns a lease.](../../../../public/talks/assets/dynamic-scaling/07-infra-as-an-agent-capability.svg)</a:t>
             </a:r>
             <a:endParaRPr lang="en-US" sz="1200"/>
           </a:p>
@@ -8998,7 +8998,7 @@
                 <a:ea typeface="Arial"/>
                 <a:cs typeface="Arial"/>
               </a:rPr>
-              <a:t xml:space="preserve">![The job requests shape, size, duration and a cost cap; the scheduler resolves it against a catalog and tenant budget and returns a lease.](../../reveal-talks/assets/dynamic-scaling/07-infra-as-an-agent-capability.svg)</a:t>
+              <a:t xml:space="preserve">![The job requests shape, size, duration and a cost cap; the scheduler resolves it against a catalog and tenant budget and returns a lease.](../../../../public/talks/assets/dynamic-scaling/07-infra-as-an-agent-capability.svg)</a:t>
             </a:r>
             <a:endParaRPr lang="en-US" sz="1200"/>
           </a:p>
